--- a/morning-registration-activities/unfinished-story/downloads/Unfinished_Story.pptx
+++ b/morning-registration-activities/unfinished-story/downloads/Unfinished_Story.pptx
@@ -2375,7 +2375,7 @@
                 <a:ea typeface="Libre Caslon Display" pitchFamily="34" charset="-122"/>
                 <a:cs typeface="Libre Caslon Display" pitchFamily="34" charset="-120"/>
               </a:rPr>
-              <a:t>The Bag by the Gate</a:t>
+              <a:t>The Bag at the Bus Stop</a:t>
             </a:r>
             <a:endParaRPr lang="en-US" sz="2700" dirty="0"/>
           </a:p>
@@ -2941,7 +2941,7 @@
                 <a:ea typeface="Libre Caslon Display" pitchFamily="34" charset="-122"/>
                 <a:cs typeface="Libre Caslon Display" pitchFamily="34" charset="-120"/>
               </a:rPr>
-              <a:t>Priya wants to say thank you in assembly, in front of everyone. Sam feels strange about the attention, and quietly asks a friend not to mention it. The friend thinks Sam deserves the credit, and tells a teacher anyway.</a:t>
+              <a:t>Priya wants to thank the finder in assembly, in front of everyone. Sam feels strange about the attention, and asks a friend not to say who it was. The friend thinks Sam deserves the credit, and tells a teacher anyway.</a:t>
             </a:r>
             <a:endParaRPr lang="en-US" sz="1900" dirty="0"/>
           </a:p>
@@ -3913,7 +3913,7 @@
                 <a:ea typeface="Libre Caslon Display" pitchFamily="34" charset="-122"/>
                 <a:cs typeface="Libre Caslon Display" pitchFamily="34" charset="-120"/>
               </a:rPr>
-              <a:t>Then Sam finds out, from someone else, that this person said something unkind about Sam behind their back, months before any of this started.</a:t>
+              <a:t>Then Sam finds out, from someone else, that this person had said something unkind about Sam, months before any of this started.</a:t>
             </a:r>
             <a:endParaRPr lang="en-US" sz="1900" dirty="0"/>
           </a:p>

--- a/morning-registration-activities/unfinished-story/downloads/Unfinished_Story.pptx
+++ b/morning-registration-activities/unfinished-story/downloads/Unfinished_Story.pptx
@@ -1366,9 +1366,9 @@
                 <a:solidFill>
                   <a:srgbClr val="3F7D8C"/>
                 </a:solidFill>
-                <a:latin typeface="Karla" pitchFamily="34" charset="0"/>
-                <a:ea typeface="Karla" pitchFamily="34" charset="-122"/>
-                <a:cs typeface="Karla" pitchFamily="34" charset="-120"/>
+                <a:latin typeface="Calibri" pitchFamily="34" charset="0"/>
+                <a:ea typeface="Calibri" pitchFamily="34" charset="-122"/>
+                <a:cs typeface="Calibri" pitchFamily="34" charset="-120"/>
               </a:rPr>
               <a:t>MORNING REGISTRATION ACTIVITIES</a:t>
             </a:r>
@@ -1401,13 +1401,13 @@
               <a:buNone/>
             </a:pPr>
             <a:r>
-              <a:rPr lang="en-US" sz="4200" b="1" dirty="0">
+              <a:rPr lang="en-US" sz="4200" b="0" dirty="0">
                 <a:solidFill>
                   <a:srgbClr val="1F4247"/>
                 </a:solidFill>
-                <a:latin typeface="Libre Caslon Display" pitchFamily="34" charset="0"/>
-                <a:ea typeface="Libre Caslon Display" pitchFamily="34" charset="-122"/>
-                <a:cs typeface="Libre Caslon Display" pitchFamily="34" charset="-120"/>
+                <a:latin typeface="Georgia" pitchFamily="34" charset="0"/>
+                <a:ea typeface="Georgia" pitchFamily="34" charset="-122"/>
+                <a:cs typeface="Georgia" pitchFamily="34" charset="-120"/>
               </a:rPr>
               <a:t>The Unfinished Story</a:t>
             </a:r>
@@ -1470,9 +1470,9 @@
                 <a:solidFill>
                   <a:srgbClr val="FFFDF7"/>
                 </a:solidFill>
-                <a:latin typeface="Karla" pitchFamily="34" charset="0"/>
-                <a:ea typeface="Karla" pitchFamily="34" charset="-122"/>
-                <a:cs typeface="Karla" pitchFamily="34" charset="-120"/>
+                <a:latin typeface="Calibri" pitchFamily="34" charset="0"/>
+                <a:ea typeface="Calibri" pitchFamily="34" charset="-122"/>
+                <a:cs typeface="Calibri" pitchFamily="34" charset="-120"/>
               </a:rPr>
               <a:t>VOLUME ONE</a:t>
             </a:r>
@@ -1509,9 +1509,9 @@
                 <a:solidFill>
                   <a:srgbClr val="335D63"/>
                 </a:solidFill>
-                <a:latin typeface="Karla" pitchFamily="34" charset="0"/>
-                <a:ea typeface="Karla" pitchFamily="34" charset="-122"/>
-                <a:cs typeface="Karla" pitchFamily="34" charset="-120"/>
+                <a:latin typeface="Calibri" pitchFamily="34" charset="0"/>
+                <a:ea typeface="Calibri" pitchFamily="34" charset="-122"/>
+                <a:cs typeface="Calibri" pitchFamily="34" charset="-120"/>
               </a:rPr>
               <a:t>A story in five weekly chapters. Each one ends on a choice with no clean answer, and the next chapter opens by revealing what actually happened.</a:t>
             </a:r>
@@ -1639,9 +1639,9 @@
                 <a:solidFill>
                   <a:srgbClr val="FFFDF7"/>
                 </a:solidFill>
-                <a:latin typeface="Karla" pitchFamily="34" charset="0"/>
-                <a:ea typeface="Karla" pitchFamily="34" charset="-122"/>
-                <a:cs typeface="Karla" pitchFamily="34" charset="-120"/>
+                <a:latin typeface="Calibri" pitchFamily="34" charset="0"/>
+                <a:ea typeface="Calibri" pitchFamily="34" charset="-122"/>
+                <a:cs typeface="Calibri" pitchFamily="34" charset="-120"/>
               </a:rPr>
               <a:t>1</a:t>
             </a:r>
@@ -1678,9 +1678,9 @@
                 <a:solidFill>
                   <a:srgbClr val="1F4247"/>
                 </a:solidFill>
-                <a:latin typeface="Karla" pitchFamily="34" charset="0"/>
-                <a:ea typeface="Karla" pitchFamily="34" charset="-122"/>
-                <a:cs typeface="Karla" pitchFamily="34" charset="-120"/>
+                <a:latin typeface="Calibri" pitchFamily="34" charset="0"/>
+                <a:ea typeface="Calibri" pitchFamily="34" charset="-122"/>
+                <a:cs typeface="Calibri" pitchFamily="34" charset="-120"/>
               </a:rPr>
               <a:t>Recap what happened</a:t>
             </a:r>
@@ -1720,9 +1720,9 @@
                 <a:solidFill>
                   <a:srgbClr val="335D63"/>
                 </a:solidFill>
-                <a:latin typeface="Karla" pitchFamily="34" charset="0"/>
-                <a:ea typeface="Karla" pitchFamily="34" charset="-122"/>
-                <a:cs typeface="Karla" pitchFamily="34" charset="-120"/>
+                <a:latin typeface="Calibri" pitchFamily="34" charset="0"/>
+                <a:ea typeface="Calibri" pitchFamily="34" charset="-122"/>
+                <a:cs typeface="Calibri" pitchFamily="34" charset="-120"/>
               </a:rPr>
               <a:t>From chapter two on, read what last week’s choice actually led to.</a:t>
             </a:r>
@@ -1850,9 +1850,9 @@
                 <a:solidFill>
                   <a:srgbClr val="FFFDF7"/>
                 </a:solidFill>
-                <a:latin typeface="Karla" pitchFamily="34" charset="0"/>
-                <a:ea typeface="Karla" pitchFamily="34" charset="-122"/>
-                <a:cs typeface="Karla" pitchFamily="34" charset="-120"/>
+                <a:latin typeface="Calibri" pitchFamily="34" charset="0"/>
+                <a:ea typeface="Calibri" pitchFamily="34" charset="-122"/>
+                <a:cs typeface="Calibri" pitchFamily="34" charset="-120"/>
               </a:rPr>
               <a:t>2</a:t>
             </a:r>
@@ -1889,9 +1889,9 @@
                 <a:solidFill>
                   <a:srgbClr val="1F4247"/>
                 </a:solidFill>
-                <a:latin typeface="Karla" pitchFamily="34" charset="0"/>
-                <a:ea typeface="Karla" pitchFamily="34" charset="-122"/>
-                <a:cs typeface="Karla" pitchFamily="34" charset="-120"/>
+                <a:latin typeface="Calibri" pitchFamily="34" charset="0"/>
+                <a:ea typeface="Calibri" pitchFamily="34" charset="-122"/>
+                <a:cs typeface="Calibri" pitchFamily="34" charset="-120"/>
               </a:rPr>
               <a:t>Read this week’s chapter</a:t>
             </a:r>
@@ -1931,9 +1931,9 @@
                 <a:solidFill>
                   <a:srgbClr val="335D63"/>
                 </a:solidFill>
-                <a:latin typeface="Karla" pitchFamily="34" charset="0"/>
-                <a:ea typeface="Karla" pitchFamily="34" charset="-122"/>
-                <a:cs typeface="Karla" pitchFamily="34" charset="-120"/>
+                <a:latin typeface="Calibri" pitchFamily="34" charset="0"/>
+                <a:ea typeface="Calibri" pitchFamily="34" charset="-122"/>
+                <a:cs typeface="Calibri" pitchFamily="34" charset="-120"/>
               </a:rPr>
               <a:t>One chapter a week, in order: a short scene ending on a new choice with no clean answer.</a:t>
             </a:r>
@@ -2061,9 +2061,9 @@
                 <a:solidFill>
                   <a:srgbClr val="FFFDF7"/>
                 </a:solidFill>
-                <a:latin typeface="Karla" pitchFamily="34" charset="0"/>
-                <a:ea typeface="Karla" pitchFamily="34" charset="-122"/>
-                <a:cs typeface="Karla" pitchFamily="34" charset="-120"/>
+                <a:latin typeface="Calibri" pitchFamily="34" charset="0"/>
+                <a:ea typeface="Calibri" pitchFamily="34" charset="-122"/>
+                <a:cs typeface="Calibri" pitchFamily="34" charset="-120"/>
               </a:rPr>
               <a:t>3</a:t>
             </a:r>
@@ -2100,9 +2100,9 @@
                 <a:solidFill>
                   <a:srgbClr val="1F4247"/>
                 </a:solidFill>
-                <a:latin typeface="Karla" pitchFamily="34" charset="0"/>
-                <a:ea typeface="Karla" pitchFamily="34" charset="-122"/>
-                <a:cs typeface="Karla" pitchFamily="34" charset="-120"/>
+                <a:latin typeface="Calibri" pitchFamily="34" charset="0"/>
+                <a:ea typeface="Calibri" pitchFamily="34" charset="-122"/>
+                <a:cs typeface="Calibri" pitchFamily="34" charset="-120"/>
               </a:rPr>
               <a:t>Open it up</a:t>
             </a:r>
@@ -2142,9 +2142,9 @@
                 <a:solidFill>
                   <a:srgbClr val="335D63"/>
                 </a:solidFill>
-                <a:latin typeface="Karla" pitchFamily="34" charset="0"/>
-                <a:ea typeface="Karla" pitchFamily="34" charset="-122"/>
-                <a:cs typeface="Karla" pitchFamily="34" charset="-120"/>
+                <a:latin typeface="Calibri" pitchFamily="34" charset="0"/>
+                <a:ea typeface="Calibri" pitchFamily="34" charset="-122"/>
+                <a:cs typeface="Calibri" pitchFamily="34" charset="-120"/>
               </a:rPr>
               <a:t>No need to land on a conclusion. The story continues either way.</a:t>
             </a:r>
@@ -2181,9 +2181,9 @@
                 <a:solidFill>
                   <a:srgbClr val="7FA0A4"/>
                 </a:solidFill>
-                <a:latin typeface="Karla" pitchFamily="34" charset="0"/>
-                <a:ea typeface="Karla" pitchFamily="34" charset="-122"/>
-                <a:cs typeface="Karla" pitchFamily="34" charset="-120"/>
+                <a:latin typeface="Calibri" pitchFamily="34" charset="0"/>
+                <a:ea typeface="Calibri" pitchFamily="34" charset="-122"/>
+                <a:cs typeface="Calibri" pitchFamily="34" charset="-120"/>
               </a:rPr>
               <a:t>Needs: nothing to prepare. All five chapters are already loaded into this deck. This is Volume One; more will follow on the website.</a:t>
             </a:r>
@@ -2244,9 +2244,9 @@
                 <a:solidFill>
                   <a:srgbClr val="7FA0A4"/>
                 </a:solidFill>
-                <a:latin typeface="Libre Caslon Display" pitchFamily="34" charset="0"/>
-                <a:ea typeface="Libre Caslon Display" pitchFamily="34" charset="-122"/>
-                <a:cs typeface="Libre Caslon Display" pitchFamily="34" charset="-120"/>
+                <a:latin typeface="Georgia" pitchFamily="34" charset="0"/>
+                <a:ea typeface="Georgia" pitchFamily="34" charset="-122"/>
+                <a:cs typeface="Georgia" pitchFamily="34" charset="-120"/>
               </a:rPr>
               <a:t>The Pastoral Guide</a:t>
             </a:r>
@@ -2332,9 +2332,9 @@
                 <a:solidFill>
                   <a:srgbClr val="3F7D8C"/>
                 </a:solidFill>
-                <a:latin typeface="Karla" pitchFamily="34" charset="0"/>
-                <a:ea typeface="Karla" pitchFamily="34" charset="-122"/>
-                <a:cs typeface="Karla" pitchFamily="34" charset="-120"/>
+                <a:latin typeface="Calibri" pitchFamily="34" charset="0"/>
+                <a:ea typeface="Calibri" pitchFamily="34" charset="-122"/>
+                <a:cs typeface="Calibri" pitchFamily="34" charset="-120"/>
               </a:rPr>
               <a:t>THE UNFINISHED STORY  ·  VOLUME ONE  ·  CHAPTER 1</a:t>
             </a:r>
@@ -2367,13 +2367,13 @@
               <a:buNone/>
             </a:pPr>
             <a:r>
-              <a:rPr lang="en-US" sz="2700" b="1" dirty="0">
+              <a:rPr lang="en-US" sz="2700" b="0" dirty="0">
                 <a:solidFill>
                   <a:srgbClr val="1F4247"/>
                 </a:solidFill>
-                <a:latin typeface="Libre Caslon Display" pitchFamily="34" charset="0"/>
-                <a:ea typeface="Libre Caslon Display" pitchFamily="34" charset="-122"/>
-                <a:cs typeface="Libre Caslon Display" pitchFamily="34" charset="-120"/>
+                <a:latin typeface="Georgia" pitchFamily="34" charset="0"/>
+                <a:ea typeface="Georgia" pitchFamily="34" charset="-122"/>
+                <a:cs typeface="Georgia" pitchFamily="34" charset="-120"/>
               </a:rPr>
               <a:t>The Bag at the Bus Stop</a:t>
             </a:r>
@@ -2451,9 +2451,9 @@
                 <a:solidFill>
                   <a:srgbClr val="1F4247"/>
                 </a:solidFill>
-                <a:latin typeface="Libre Caslon Display" pitchFamily="34" charset="0"/>
-                <a:ea typeface="Libre Caslon Display" pitchFamily="34" charset="-122"/>
-                <a:cs typeface="Libre Caslon Display" pitchFamily="34" charset="-120"/>
+                <a:latin typeface="Georgia" pitchFamily="34" charset="0"/>
+                <a:ea typeface="Georgia" pitchFamily="34" charset="-122"/>
+                <a:cs typeface="Georgia" pitchFamily="34" charset="-120"/>
               </a:rPr>
               <a:t>On the walk to school, Sam spots a bag left behind at the bus stop. Inside: a phone, a bit of cash, and a house key. Nobody else is around, and the next bus is already pulling in.</a:t>
             </a:r>
@@ -2520,9 +2520,9 @@
                 <a:solidFill>
                   <a:srgbClr val="3F7D8C"/>
                 </a:solidFill>
-                <a:latin typeface="Karla" pitchFamily="34" charset="0"/>
-                <a:ea typeface="Karla" pitchFamily="34" charset="-122"/>
-                <a:cs typeface="Karla" pitchFamily="34" charset="-120"/>
+                <a:latin typeface="Calibri" pitchFamily="34" charset="0"/>
+                <a:ea typeface="Calibri" pitchFamily="34" charset="-122"/>
+                <a:cs typeface="Calibri" pitchFamily="34" charset="-120"/>
               </a:rPr>
               <a:t>What should Sam do?</a:t>
             </a:r>
@@ -2559,9 +2559,9 @@
                 <a:solidFill>
                   <a:srgbClr val="335D63"/>
                 </a:solidFill>
-                <a:latin typeface="Karla" pitchFamily="34" charset="0"/>
-                <a:ea typeface="Karla" pitchFamily="34" charset="-122"/>
-                <a:cs typeface="Karla" pitchFamily="34" charset="-120"/>
+                <a:latin typeface="Calibri" pitchFamily="34" charset="0"/>
+                <a:ea typeface="Calibri" pitchFamily="34" charset="-122"/>
+                <a:cs typeface="Calibri" pitchFamily="34" charset="-120"/>
               </a:rPr>
               <a:t>No right answer. What do you think?</a:t>
             </a:r>
@@ -2622,9 +2622,9 @@
                 <a:solidFill>
                   <a:srgbClr val="7FA0A4"/>
                 </a:solidFill>
-                <a:latin typeface="Libre Caslon Display" pitchFamily="34" charset="0"/>
-                <a:ea typeface="Libre Caslon Display" pitchFamily="34" charset="-122"/>
-                <a:cs typeface="Libre Caslon Display" pitchFamily="34" charset="-120"/>
+                <a:latin typeface="Georgia" pitchFamily="34" charset="0"/>
+                <a:ea typeface="Georgia" pitchFamily="34" charset="-122"/>
+                <a:cs typeface="Georgia" pitchFamily="34" charset="-120"/>
               </a:rPr>
               <a:t>The Pastoral Guide</a:t>
             </a:r>
@@ -2710,9 +2710,9 @@
                 <a:solidFill>
                   <a:srgbClr val="3F7D8C"/>
                 </a:solidFill>
-                <a:latin typeface="Karla" pitchFamily="34" charset="0"/>
-                <a:ea typeface="Karla" pitchFamily="34" charset="-122"/>
-                <a:cs typeface="Karla" pitchFamily="34" charset="-120"/>
+                <a:latin typeface="Calibri" pitchFamily="34" charset="0"/>
+                <a:ea typeface="Calibri" pitchFamily="34" charset="-122"/>
+                <a:cs typeface="Calibri" pitchFamily="34" charset="-120"/>
               </a:rPr>
               <a:t>THE UNFINISHED STORY  ·  VOLUME ONE  ·  CHAPTER 2</a:t>
             </a:r>
@@ -2745,13 +2745,13 @@
               <a:buNone/>
             </a:pPr>
             <a:r>
-              <a:rPr lang="en-US" sz="2700" b="1" dirty="0">
+              <a:rPr lang="en-US" sz="2700" b="0" dirty="0">
                 <a:solidFill>
                   <a:srgbClr val="1F4247"/>
                 </a:solidFill>
-                <a:latin typeface="Libre Caslon Display" pitchFamily="34" charset="0"/>
-                <a:ea typeface="Libre Caslon Display" pitchFamily="34" charset="-122"/>
-                <a:cs typeface="Libre Caslon Display" pitchFamily="34" charset="-120"/>
+                <a:latin typeface="Georgia" pitchFamily="34" charset="0"/>
+                <a:ea typeface="Georgia" pitchFamily="34" charset="-122"/>
+                <a:cs typeface="Georgia" pitchFamily="34" charset="-120"/>
               </a:rPr>
               <a:t>The Assembly</a:t>
             </a:r>
@@ -2826,9 +2826,9 @@
                 <a:solidFill>
                   <a:srgbClr val="3F7D8C"/>
                 </a:solidFill>
-                <a:latin typeface="Karla" pitchFamily="34" charset="0"/>
-                <a:ea typeface="Karla" pitchFamily="34" charset="-122"/>
-                <a:cs typeface="Karla" pitchFamily="34" charset="-120"/>
+                <a:latin typeface="Calibri" pitchFamily="34" charset="0"/>
+                <a:ea typeface="Calibri" pitchFamily="34" charset="-122"/>
+                <a:cs typeface="Calibri" pitchFamily="34" charset="-120"/>
               </a:rPr>
               <a:t>SO FAR...</a:t>
             </a:r>
@@ -2868,9 +2868,9 @@
                 <a:solidFill>
                   <a:srgbClr val="335D63"/>
                 </a:solidFill>
-                <a:latin typeface="Karla" pitchFamily="34" charset="0"/>
-                <a:ea typeface="Karla" pitchFamily="34" charset="-122"/>
-                <a:cs typeface="Karla" pitchFamily="34" charset="-120"/>
+                <a:latin typeface="Calibri" pitchFamily="34" charset="0"/>
+                <a:ea typeface="Calibri" pitchFamily="34" charset="-122"/>
+                <a:cs typeface="Calibri" pitchFamily="34" charset="-120"/>
               </a:rPr>
               <a:t>Sam handed the bag straight to the school office. Three days later, a girl named Priya came looking for it. It was hers, and the only photo she has of her nan was inside.</a:t>
             </a:r>
@@ -2937,9 +2937,9 @@
                 <a:solidFill>
                   <a:srgbClr val="1F4247"/>
                 </a:solidFill>
-                <a:latin typeface="Libre Caslon Display" pitchFamily="34" charset="0"/>
-                <a:ea typeface="Libre Caslon Display" pitchFamily="34" charset="-122"/>
-                <a:cs typeface="Libre Caslon Display" pitchFamily="34" charset="-120"/>
+                <a:latin typeface="Georgia" pitchFamily="34" charset="0"/>
+                <a:ea typeface="Georgia" pitchFamily="34" charset="-122"/>
+                <a:cs typeface="Georgia" pitchFamily="34" charset="-120"/>
               </a:rPr>
               <a:t>Priya wants to thank the finder in assembly, in front of everyone. Sam feels strange about the attention, and asks a friend not to say who it was. The friend thinks Sam deserves the credit, and tells a teacher anyway.</a:t>
             </a:r>
@@ -3006,9 +3006,9 @@
                 <a:solidFill>
                   <a:srgbClr val="3F7D8C"/>
                 </a:solidFill>
-                <a:latin typeface="Karla" pitchFamily="34" charset="0"/>
-                <a:ea typeface="Karla" pitchFamily="34" charset="-122"/>
-                <a:cs typeface="Karla" pitchFamily="34" charset="-120"/>
+                <a:latin typeface="Calibri" pitchFamily="34" charset="0"/>
+                <a:ea typeface="Calibri" pitchFamily="34" charset="-122"/>
+                <a:cs typeface="Calibri" pitchFamily="34" charset="-120"/>
               </a:rPr>
               <a:t>Was the friend right to tell, even though Sam didn’t want the attention?</a:t>
             </a:r>
@@ -3045,9 +3045,9 @@
                 <a:solidFill>
                   <a:srgbClr val="335D63"/>
                 </a:solidFill>
-                <a:latin typeface="Karla" pitchFamily="34" charset="0"/>
-                <a:ea typeface="Karla" pitchFamily="34" charset="-122"/>
-                <a:cs typeface="Karla" pitchFamily="34" charset="-120"/>
+                <a:latin typeface="Calibri" pitchFamily="34" charset="0"/>
+                <a:ea typeface="Calibri" pitchFamily="34" charset="-122"/>
+                <a:cs typeface="Calibri" pitchFamily="34" charset="-120"/>
               </a:rPr>
               <a:t>No right answer. What do you think?</a:t>
             </a:r>
@@ -3108,9 +3108,9 @@
                 <a:solidFill>
                   <a:srgbClr val="7FA0A4"/>
                 </a:solidFill>
-                <a:latin typeface="Libre Caslon Display" pitchFamily="34" charset="0"/>
-                <a:ea typeface="Libre Caslon Display" pitchFamily="34" charset="-122"/>
-                <a:cs typeface="Libre Caslon Display" pitchFamily="34" charset="-120"/>
+                <a:latin typeface="Georgia" pitchFamily="34" charset="0"/>
+                <a:ea typeface="Georgia" pitchFamily="34" charset="-122"/>
+                <a:cs typeface="Georgia" pitchFamily="34" charset="-120"/>
               </a:rPr>
               <a:t>The Pastoral Guide</a:t>
             </a:r>
@@ -3196,9 +3196,9 @@
                 <a:solidFill>
                   <a:srgbClr val="3F7D8C"/>
                 </a:solidFill>
-                <a:latin typeface="Karla" pitchFamily="34" charset="0"/>
-                <a:ea typeface="Karla" pitchFamily="34" charset="-122"/>
-                <a:cs typeface="Karla" pitchFamily="34" charset="-120"/>
+                <a:latin typeface="Calibri" pitchFamily="34" charset="0"/>
+                <a:ea typeface="Calibri" pitchFamily="34" charset="-122"/>
+                <a:cs typeface="Calibri" pitchFamily="34" charset="-120"/>
               </a:rPr>
               <a:t>THE UNFINISHED STORY  ·  VOLUME ONE  ·  CHAPTER 3</a:t>
             </a:r>
@@ -3231,13 +3231,13 @@
               <a:buNone/>
             </a:pPr>
             <a:r>
-              <a:rPr lang="en-US" sz="2700" b="1" dirty="0">
+              <a:rPr lang="en-US" sz="2700" b="0" dirty="0">
                 <a:solidFill>
                   <a:srgbClr val="1F4247"/>
                 </a:solidFill>
-                <a:latin typeface="Libre Caslon Display" pitchFamily="34" charset="0"/>
-                <a:ea typeface="Libre Caslon Display" pitchFamily="34" charset="-122"/>
-                <a:cs typeface="Libre Caslon Display" pitchFamily="34" charset="-120"/>
+                <a:latin typeface="Georgia" pitchFamily="34" charset="0"/>
+                <a:ea typeface="Georgia" pitchFamily="34" charset="-122"/>
+                <a:cs typeface="Georgia" pitchFamily="34" charset="-120"/>
               </a:rPr>
               <a:t>The Empty Seat</a:t>
             </a:r>
@@ -3312,9 +3312,9 @@
                 <a:solidFill>
                   <a:srgbClr val="3F7D8C"/>
                 </a:solidFill>
-                <a:latin typeface="Karla" pitchFamily="34" charset="0"/>
-                <a:ea typeface="Karla" pitchFamily="34" charset="-122"/>
-                <a:cs typeface="Karla" pitchFamily="34" charset="-120"/>
+                <a:latin typeface="Calibri" pitchFamily="34" charset="0"/>
+                <a:ea typeface="Calibri" pitchFamily="34" charset="-122"/>
+                <a:cs typeface="Calibri" pitchFamily="34" charset="-120"/>
               </a:rPr>
               <a:t>SO FAR...</a:t>
             </a:r>
@@ -3354,9 +3354,9 @@
                 <a:solidFill>
                   <a:srgbClr val="335D63"/>
                 </a:solidFill>
-                <a:latin typeface="Karla" pitchFamily="34" charset="0"/>
-                <a:ea typeface="Karla" pitchFamily="34" charset="-122"/>
-                <a:cs typeface="Karla" pitchFamily="34" charset="-120"/>
+                <a:latin typeface="Calibri" pitchFamily="34" charset="0"/>
+                <a:ea typeface="Calibri" pitchFamily="34" charset="-122"/>
+                <a:cs typeface="Calibri" pitchFamily="34" charset="-120"/>
               </a:rPr>
               <a:t>The teacher mentioned it at the end of registration, one sentence, not a whole assembly moment. Sam went red, but it passed quickly.</a:t>
             </a:r>
@@ -3423,9 +3423,9 @@
                 <a:solidFill>
                   <a:srgbClr val="1F4247"/>
                 </a:solidFill>
-                <a:latin typeface="Libre Caslon Display" pitchFamily="34" charset="0"/>
-                <a:ea typeface="Libre Caslon Display" pitchFamily="34" charset="-122"/>
-                <a:cs typeface="Libre Caslon Display" pitchFamily="34" charset="-120"/>
+                <a:latin typeface="Georgia" pitchFamily="34" charset="0"/>
+                <a:ea typeface="Georgia" pitchFamily="34" charset="-122"/>
+                <a:cs typeface="Georgia" pitchFamily="34" charset="-120"/>
               </a:rPr>
               <a:t>A few weeks later, Sam notices someone being quietly left out. Not bullied exactly, just never asked to sit with the group at lunch, week after week.</a:t>
             </a:r>
@@ -3492,9 +3492,9 @@
                 <a:solidFill>
                   <a:srgbClr val="3F7D8C"/>
                 </a:solidFill>
-                <a:latin typeface="Karla" pitchFamily="34" charset="0"/>
-                <a:ea typeface="Karla" pitchFamily="34" charset="-122"/>
-                <a:cs typeface="Karla" pitchFamily="34" charset="-120"/>
+                <a:latin typeface="Calibri" pitchFamily="34" charset="0"/>
+                <a:ea typeface="Calibri" pitchFamily="34" charset="-122"/>
+                <a:cs typeface="Calibri" pitchFamily="34" charset="-120"/>
               </a:rPr>
               <a:t>Is doing nothing about something like this the same as taking a side?</a:t>
             </a:r>
@@ -3531,9 +3531,9 @@
                 <a:solidFill>
                   <a:srgbClr val="335D63"/>
                 </a:solidFill>
-                <a:latin typeface="Karla" pitchFamily="34" charset="0"/>
-                <a:ea typeface="Karla" pitchFamily="34" charset="-122"/>
-                <a:cs typeface="Karla" pitchFamily="34" charset="-120"/>
+                <a:latin typeface="Calibri" pitchFamily="34" charset="0"/>
+                <a:ea typeface="Calibri" pitchFamily="34" charset="-122"/>
+                <a:cs typeface="Calibri" pitchFamily="34" charset="-120"/>
               </a:rPr>
               <a:t>No right answer. What do you think?</a:t>
             </a:r>
@@ -3594,9 +3594,9 @@
                 <a:solidFill>
                   <a:srgbClr val="7FA0A4"/>
                 </a:solidFill>
-                <a:latin typeface="Libre Caslon Display" pitchFamily="34" charset="0"/>
-                <a:ea typeface="Libre Caslon Display" pitchFamily="34" charset="-122"/>
-                <a:cs typeface="Libre Caslon Display" pitchFamily="34" charset="-120"/>
+                <a:latin typeface="Georgia" pitchFamily="34" charset="0"/>
+                <a:ea typeface="Georgia" pitchFamily="34" charset="-122"/>
+                <a:cs typeface="Georgia" pitchFamily="34" charset="-120"/>
               </a:rPr>
               <a:t>The Pastoral Guide</a:t>
             </a:r>
@@ -3682,9 +3682,9 @@
                 <a:solidFill>
                   <a:srgbClr val="3F7D8C"/>
                 </a:solidFill>
-                <a:latin typeface="Karla" pitchFamily="34" charset="0"/>
-                <a:ea typeface="Karla" pitchFamily="34" charset="-122"/>
-                <a:cs typeface="Karla" pitchFamily="34" charset="-120"/>
+                <a:latin typeface="Calibri" pitchFamily="34" charset="0"/>
+                <a:ea typeface="Calibri" pitchFamily="34" charset="-122"/>
+                <a:cs typeface="Calibri" pitchFamily="34" charset="-120"/>
               </a:rPr>
               <a:t>THE UNFINISHED STORY  ·  VOLUME ONE  ·  CHAPTER 4</a:t>
             </a:r>
@@ -3717,13 +3717,13 @@
               <a:buNone/>
             </a:pPr>
             <a:r>
-              <a:rPr lang="en-US" sz="2700" b="1" dirty="0">
+              <a:rPr lang="en-US" sz="2700" b="0" dirty="0">
                 <a:solidFill>
                   <a:srgbClr val="1F4247"/>
                 </a:solidFill>
-                <a:latin typeface="Libre Caslon Display" pitchFamily="34" charset="0"/>
-                <a:ea typeface="Libre Caslon Display" pitchFamily="34" charset="-122"/>
-                <a:cs typeface="Libre Caslon Display" pitchFamily="34" charset="-120"/>
+                <a:latin typeface="Georgia" pitchFamily="34" charset="0"/>
+                <a:ea typeface="Georgia" pitchFamily="34" charset="-122"/>
+                <a:cs typeface="Georgia" pitchFamily="34" charset="-120"/>
               </a:rPr>
               <a:t>What Sam Heard</a:t>
             </a:r>
@@ -3798,9 +3798,9 @@
                 <a:solidFill>
                   <a:srgbClr val="3F7D8C"/>
                 </a:solidFill>
-                <a:latin typeface="Karla" pitchFamily="34" charset="0"/>
-                <a:ea typeface="Karla" pitchFamily="34" charset="-122"/>
-                <a:cs typeface="Karla" pitchFamily="34" charset="-120"/>
+                <a:latin typeface="Calibri" pitchFamily="34" charset="0"/>
+                <a:ea typeface="Calibri" pitchFamily="34" charset="-122"/>
+                <a:cs typeface="Calibri" pitchFamily="34" charset="-120"/>
               </a:rPr>
               <a:t>SO FAR...</a:t>
             </a:r>
@@ -3840,9 +3840,9 @@
                 <a:solidFill>
                   <a:srgbClr val="335D63"/>
                 </a:solidFill>
-                <a:latin typeface="Karla" pitchFamily="34" charset="0"/>
-                <a:ea typeface="Karla" pitchFamily="34" charset="-122"/>
-                <a:cs typeface="Karla" pitchFamily="34" charset="-120"/>
+                <a:latin typeface="Calibri" pitchFamily="34" charset="0"/>
+                <a:ea typeface="Calibri" pitchFamily="34" charset="-122"/>
+                <a:cs typeface="Calibri" pitchFamily="34" charset="-120"/>
               </a:rPr>
               <a:t>Sam started sitting with them sometimes, without making it a whole thing.</a:t>
             </a:r>
@@ -3909,9 +3909,9 @@
                 <a:solidFill>
                   <a:srgbClr val="1F4247"/>
                 </a:solidFill>
-                <a:latin typeface="Libre Caslon Display" pitchFamily="34" charset="0"/>
-                <a:ea typeface="Libre Caslon Display" pitchFamily="34" charset="-122"/>
-                <a:cs typeface="Libre Caslon Display" pitchFamily="34" charset="-120"/>
+                <a:latin typeface="Georgia" pitchFamily="34" charset="0"/>
+                <a:ea typeface="Georgia" pitchFamily="34" charset="-122"/>
+                <a:cs typeface="Georgia" pitchFamily="34" charset="-120"/>
               </a:rPr>
               <a:t>Then Sam finds out, from someone else, that this person had said something unkind about Sam, months before any of this started.</a:t>
             </a:r>
@@ -3978,9 +3978,9 @@
                 <a:solidFill>
                   <a:srgbClr val="3F7D8C"/>
                 </a:solidFill>
-                <a:latin typeface="Karla" pitchFamily="34" charset="0"/>
-                <a:ea typeface="Karla" pitchFamily="34" charset="-122"/>
-                <a:cs typeface="Karla" pitchFamily="34" charset="-120"/>
+                <a:latin typeface="Calibri" pitchFamily="34" charset="0"/>
+                <a:ea typeface="Calibri" pitchFamily="34" charset="-122"/>
+                <a:cs typeface="Calibri" pitchFamily="34" charset="-120"/>
               </a:rPr>
               <a:t>Does knowing that change what Sam should do now?</a:t>
             </a:r>
@@ -4017,9 +4017,9 @@
                 <a:solidFill>
                   <a:srgbClr val="335D63"/>
                 </a:solidFill>
-                <a:latin typeface="Karla" pitchFamily="34" charset="0"/>
-                <a:ea typeface="Karla" pitchFamily="34" charset="-122"/>
-                <a:cs typeface="Karla" pitchFamily="34" charset="-120"/>
+                <a:latin typeface="Calibri" pitchFamily="34" charset="0"/>
+                <a:ea typeface="Calibri" pitchFamily="34" charset="-122"/>
+                <a:cs typeface="Calibri" pitchFamily="34" charset="-120"/>
               </a:rPr>
               <a:t>No right answer. What do you think?</a:t>
             </a:r>
@@ -4080,9 +4080,9 @@
                 <a:solidFill>
                   <a:srgbClr val="7FA0A4"/>
                 </a:solidFill>
-                <a:latin typeface="Libre Caslon Display" pitchFamily="34" charset="0"/>
-                <a:ea typeface="Libre Caslon Display" pitchFamily="34" charset="-122"/>
-                <a:cs typeface="Libre Caslon Display" pitchFamily="34" charset="-120"/>
+                <a:latin typeface="Georgia" pitchFamily="34" charset="0"/>
+                <a:ea typeface="Georgia" pitchFamily="34" charset="-122"/>
+                <a:cs typeface="Georgia" pitchFamily="34" charset="-120"/>
               </a:rPr>
               <a:t>The Pastoral Guide</a:t>
             </a:r>
@@ -4168,9 +4168,9 @@
                 <a:solidFill>
                   <a:srgbClr val="3F7D8C"/>
                 </a:solidFill>
-                <a:latin typeface="Karla" pitchFamily="34" charset="0"/>
-                <a:ea typeface="Karla" pitchFamily="34" charset="-122"/>
-                <a:cs typeface="Karla" pitchFamily="34" charset="-120"/>
+                <a:latin typeface="Calibri" pitchFamily="34" charset="0"/>
+                <a:ea typeface="Calibri" pitchFamily="34" charset="-122"/>
+                <a:cs typeface="Calibri" pitchFamily="34" charset="-120"/>
               </a:rPr>
               <a:t>THE UNFINISHED STORY  ·  VOLUME ONE  ·  CHAPTER 5</a:t>
             </a:r>
@@ -4203,13 +4203,13 @@
               <a:buNone/>
             </a:pPr>
             <a:r>
-              <a:rPr lang="en-US" sz="2700" b="1" dirty="0">
+              <a:rPr lang="en-US" sz="2700" b="0" dirty="0">
                 <a:solidFill>
                   <a:srgbClr val="1F4247"/>
                 </a:solidFill>
-                <a:latin typeface="Libre Caslon Display" pitchFamily="34" charset="0"/>
-                <a:ea typeface="Libre Caslon Display" pitchFamily="34" charset="-122"/>
-                <a:cs typeface="Libre Caslon Display" pitchFamily="34" charset="-120"/>
+                <a:latin typeface="Georgia" pitchFamily="34" charset="0"/>
+                <a:ea typeface="Georgia" pitchFamily="34" charset="-122"/>
+                <a:cs typeface="Georgia" pitchFamily="34" charset="-120"/>
               </a:rPr>
               <a:t>Small Things</a:t>
             </a:r>
@@ -4284,9 +4284,9 @@
                 <a:solidFill>
                   <a:srgbClr val="3F7D8C"/>
                 </a:solidFill>
-                <a:latin typeface="Karla" pitchFamily="34" charset="0"/>
-                <a:ea typeface="Karla" pitchFamily="34" charset="-122"/>
-                <a:cs typeface="Karla" pitchFamily="34" charset="-120"/>
+                <a:latin typeface="Calibri" pitchFamily="34" charset="0"/>
+                <a:ea typeface="Calibri" pitchFamily="34" charset="-122"/>
+                <a:cs typeface="Calibri" pitchFamily="34" charset="-120"/>
               </a:rPr>
               <a:t>SO FAR...</a:t>
             </a:r>
@@ -4326,9 +4326,9 @@
                 <a:solidFill>
                   <a:srgbClr val="335D63"/>
                 </a:solidFill>
-                <a:latin typeface="Karla" pitchFamily="34" charset="0"/>
-                <a:ea typeface="Karla" pitchFamily="34" charset="-122"/>
-                <a:cs typeface="Karla" pitchFamily="34" charset="-120"/>
+                <a:latin typeface="Calibri" pitchFamily="34" charset="0"/>
+                <a:ea typeface="Calibri" pitchFamily="34" charset="-122"/>
+                <a:cs typeface="Calibri" pitchFamily="34" charset="-120"/>
               </a:rPr>
               <a:t>Sam kept sitting there anyway. It felt strange for about a week, and then it just felt normal.</a:t>
             </a:r>
@@ -4395,9 +4395,9 @@
                 <a:solidFill>
                   <a:srgbClr val="1F4247"/>
                 </a:solidFill>
-                <a:latin typeface="Libre Caslon Display" pitchFamily="34" charset="0"/>
-                <a:ea typeface="Libre Caslon Display" pitchFamily="34" charset="-122"/>
-                <a:cs typeface="Libre Caslon Display" pitchFamily="34" charset="-120"/>
+                <a:latin typeface="Georgia" pitchFamily="34" charset="0"/>
+                <a:ea typeface="Georgia" pitchFamily="34" charset="-122"/>
+                <a:cs typeface="Georgia" pitchFamily="34" charset="-120"/>
               </a:rPr>
               <a:t>By the end of term, the two of them were just friends. Nobody made a big deal of it. Nobody even really noticed when it happened.</a:t>
             </a:r>
@@ -4464,9 +4464,9 @@
                 <a:solidFill>
                   <a:srgbClr val="3F7D8C"/>
                 </a:solidFill>
-                <a:latin typeface="Karla" pitchFamily="34" charset="0"/>
-                <a:ea typeface="Karla" pitchFamily="34" charset="-122"/>
-                <a:cs typeface="Karla" pitchFamily="34" charset="-120"/>
+                <a:latin typeface="Calibri" pitchFamily="34" charset="0"/>
+                <a:ea typeface="Calibri" pitchFamily="34" charset="-122"/>
+                <a:cs typeface="Calibri" pitchFamily="34" charset="-120"/>
               </a:rPr>
               <a:t>Do small choices like Sam’s actually add up to anything?</a:t>
             </a:r>
@@ -4503,9 +4503,9 @@
                 <a:solidFill>
                   <a:srgbClr val="335D63"/>
                 </a:solidFill>
-                <a:latin typeface="Karla" pitchFamily="34" charset="0"/>
-                <a:ea typeface="Karla" pitchFamily="34" charset="-122"/>
-                <a:cs typeface="Karla" pitchFamily="34" charset="-120"/>
+                <a:latin typeface="Calibri" pitchFamily="34" charset="0"/>
+                <a:ea typeface="Calibri" pitchFamily="34" charset="-122"/>
+                <a:cs typeface="Calibri" pitchFamily="34" charset="-120"/>
               </a:rPr>
               <a:t>No right answer. What do you think?</a:t>
             </a:r>
@@ -4566,9 +4566,9 @@
                 <a:solidFill>
                   <a:srgbClr val="7FA0A4"/>
                 </a:solidFill>
-                <a:latin typeface="Libre Caslon Display" pitchFamily="34" charset="0"/>
-                <a:ea typeface="Libre Caslon Display" pitchFamily="34" charset="-122"/>
-                <a:cs typeface="Libre Caslon Display" pitchFamily="34" charset="-120"/>
+                <a:latin typeface="Georgia" pitchFamily="34" charset="0"/>
+                <a:ea typeface="Georgia" pitchFamily="34" charset="-122"/>
+                <a:cs typeface="Georgia" pitchFamily="34" charset="-120"/>
               </a:rPr>
               <a:t>The Pastoral Guide</a:t>
             </a:r>
